--- a/blank_template.pptx
+++ b/blank_template.pptx
@@ -13,7 +13,7 @@
     <p:sldId id="261" r:id="rId12"/>
     <p:sldId id="262" r:id="rId13"/>
   </p:sldIdLst>
-  <p:sldSz cx="10287000" cy="10287000" type="screen4x3"/>
+  <p:sldSz cx="10287000" cy="12858750" type="screen4x3"/>
   <p:notesSz cx="6858000" cy="9144000"/>
   <p:defaultTextStyle>
     <a:defPPr>
